--- a/hikcloud2rtc.pptx
+++ b/hikcloud2rtc.pptx
@@ -4763,18 +4763,8 @@
           </a:bodyPr>
           <a:lstStyle/>
           <a:p>
-            <a:pPr algn="l">
-              <a:spcAft>
-                <a:spcPts val="0"/>
-              </a:spcAft>
-              <a:defRPr sz="1250" b="1">
-                <a:solidFill>
-                  <a:srgbClr val="1B5EB0"/>
-                </a:solidFill>
-              </a:defRPr>
-            </a:pPr>
-            <a:r>
-              <a:t>HTTP API (:8000):  поток, снапшот из облака, FullHD-кадр из потока — всё по одному URL-хосту</a:t>
+            <a:r>
+              <a:t>HTTP API (:8000):  поток, снапшот, FullHD-кадр, диагностика и логи — всё по одному URL-хосту</a:t>
             </a:r>
           </a:p>
         </p:txBody>
@@ -7217,7 +7207,10 @@
 15.10: оптимизации A/B/C/D (фоновая VTM-сессия, атомарный token, PACE_QUEUE_MB, parent-watch) + ретраи — 55-запросный багтест 0 сбоев
 1. Развертывание: папка hikcloud2rtc/ + docker compose up -d --build (volume: hikcloud2rtc_data)
 2. Опционально: go2rtc отдельным контейнером (RTSP/HLS)
-3. Мониторинг: алерт по /health, логирование 502/2009</a:t>
+3. Мониторинг: алерт по /health, логирование 502/2009
+17–18.10: WORKER_MODE always/idle + /prime (прогрев по звонку) + idle-reaper — 0 утечек активных клиентов
+Логи: app.log + worker_*.log с ротацией в volume, эндпоинт /logs, docker json-file 10m×1 (единый стандарт по хостам Dockhand)
+snapshot: re-login + 1 retry при 401 (токен истекал), обрезка хвоста JPEG после EOI</a:t>
             </a:r>
           </a:p>
         </p:txBody>
@@ -7262,33 +7255,13 @@
           </a:bodyPr>
           <a:lstStyle/>
           <a:p>
-            <a:pPr>
-              <a:spcAft>
-                <a:spcPts val="300"/>
-              </a:spcAft>
-            </a:pPr>
-            <a:r>
-              <a:rPr sz="2800" b="1">
+            <a:r>
+              <a:rPr sz="2800">
                 <a:solidFill>
                   <a:srgbClr val="2D3748"/>
                 </a:solidFill>
               </a:rPr>
-              <a:t>Матрица: WORKER_MODE × PACE_FRAMES — все 4 комбинации в проде</a:t>
-            </a:r>
-          </a:p>
-          <a:p>
-            <a:pPr>
-              <a:spcAft>
-                <a:spcPts val="600"/>
-              </a:spcAft>
-            </a:pPr>
-            <a:r>
-              <a:rPr sz="1350" b="0">
-                <a:solidFill>
-                  <a:srgbClr val="647084"/>
-                </a:solidFill>
-              </a:rPr>
-              <a:t>16.10.2026, cam8 (NVR J88212190), код cd943dd. 4 прогона × 20 запросов (frame×8, stream×2, snap×2, параллельно, гонка) — 0 сбоев</a:t>
+              <a:t>Долгие тесты: WORKER_MODE × PACE_FRAMES — 4 комбинации под нагрузкой</a:t>
             </a:r>
           </a:p>
         </p:txBody>
@@ -7327,7 +7300,7 @@
                     <a:lstStyle/>
                     <a:p>
                       <a:r>
-                        <a:rPr sz="1150" b="1">
+                        <a:rPr sz="1100" b="1">
                           <a:solidFill>
                             <a:srgbClr val="FFFFFF"/>
                           </a:solidFill>
@@ -7348,12 +7321,12 @@
                     <a:lstStyle/>
                     <a:p>
                       <a:r>
-                        <a:rPr sz="1150" b="1">
+                        <a:rPr sz="1100" b="1">
                           <a:solidFill>
                             <a:srgbClr val="FFFFFF"/>
                           </a:solidFill>
                         </a:rPr>
-                        <a:t>/frame холодный</a:t>
+                        <a:t>/frame холодный (1/2)</a:t>
                       </a:r>
                     </a:p>
                   </a:txBody>
@@ -7369,12 +7342,12 @@
                     <a:lstStyle/>
                     <a:p>
                       <a:r>
-                        <a:rPr sz="1150" b="1">
+                        <a:rPr sz="1100" b="1">
                           <a:solidFill>
                             <a:srgbClr val="FFFFFF"/>
                           </a:solidFill>
                         </a:rPr>
-                        <a:t>/prime: жд / frame</a:t>
+                        <a:t>/frame тёплый (5)</a:t>
                       </a:r>
                     </a:p>
                   </a:txBody>
@@ -7390,12 +7363,12 @@
                     <a:lstStyle/>
                     <a:p>
                       <a:r>
-                        <a:rPr sz="1150" b="1">
+                        <a:rPr sz="1100" b="1">
                           <a:solidFill>
                             <a:srgbClr val="FFFFFF"/>
                           </a:solidFill>
                         </a:rPr>
-                        <a:t>/frame тёплый</a:t>
+                        <a:t>поток sub · 60 с</a:t>
                       </a:r>
                     </a:p>
                   </a:txBody>
@@ -7411,12 +7384,12 @@
                     <a:lstStyle/>
                     <a:p>
                       <a:r>
-                        <a:rPr sz="1150" b="1">
+                        <a:rPr sz="1100" b="1">
                           <a:solidFill>
                             <a:srgbClr val="FFFFFF"/>
                           </a:solidFill>
                         </a:rPr>
-                        <a:t>/stream sub</a:t>
+                        <a:t>поток main · 60 с</a:t>
                       </a:r>
                     </a:p>
                   </a:txBody>
@@ -7432,12 +7405,12 @@
                     <a:lstStyle/>
                     <a:p>
                       <a:r>
-                        <a:rPr sz="1150" b="1">
+                        <a:rPr sz="1100" b="1">
                           <a:solidFill>
                             <a:srgbClr val="FFFFFF"/>
                           </a:solidFill>
                         </a:rPr>
-                        <a:t>snapshot</a:t>
+                        <a:t>snapshot (3×)</a:t>
                       </a:r>
                     </a:p>
                   </a:txBody>
@@ -7453,7 +7426,7 @@
                     <a:lstStyle/>
                     <a:p>
                       <a:r>
-                        <a:rPr sz="1150" b="1">
+                        <a:rPr sz="1100" b="1">
                           <a:solidFill>
                             <a:srgbClr val="FFFFFF"/>
                           </a:solidFill>
@@ -7476,7 +7449,7 @@
                     <a:lstStyle/>
                     <a:p>
                       <a:r>
-                        <a:rPr sz="1150" b="1">
+                        <a:rPr sz="1100" b="1">
                           <a:solidFill>
                             <a:srgbClr val="2D3748"/>
                           </a:solidFill>
@@ -7497,12 +7470,12 @@
                     <a:lstStyle/>
                     <a:p>
                       <a:r>
-                        <a:rPr sz="1150">
+                        <a:rPr sz="1100" b="0">
                           <a:solidFill>
                             <a:srgbClr val="2D3748"/>
                           </a:solidFill>
                         </a:rPr>
-                        <a:t>7,0 с</a:t>
+                        <a:t>7,7 / 3,2 с</a:t>
                       </a:r>
                     </a:p>
                   </a:txBody>
@@ -7518,12 +7491,12 @@
                     <a:lstStyle/>
                     <a:p>
                       <a:r>
-                        <a:rPr sz="1150">
+                        <a:rPr sz="1100" b="0">
                           <a:solidFill>
                             <a:srgbClr val="2D3748"/>
                           </a:solidFill>
                         </a:rPr>
-                        <a:t>0,0 / 3,2 с</a:t>
+                        <a:t>4,0 с</a:t>
                       </a:r>
                     </a:p>
                   </a:txBody>
@@ -7539,12 +7512,12 @@
                     <a:lstStyle/>
                     <a:p>
                       <a:r>
-                        <a:rPr sz="1150">
+                        <a:rPr sz="1100" b="0">
                           <a:solidFill>
                             <a:srgbClr val="2D3748"/>
                           </a:solidFill>
                         </a:rPr>
-                        <a:t>3,9–4,0 с (GOP)</a:t>
+                        <a:t>0.8 МБ / 0.1 Мбит/с ✓</a:t>
                       </a:r>
                     </a:p>
                   </a:txBody>
@@ -7560,12 +7533,12 @@
                     <a:lstStyle/>
                     <a:p>
                       <a:r>
-                        <a:rPr sz="1150">
+                        <a:rPr sz="1100" b="0">
                           <a:solidFill>
                             <a:srgbClr val="2D3748"/>
                           </a:solidFill>
                         </a:rPr>
-                        <a:t>2,7–5,6 с</a:t>
+                        <a:t>14.6 МБ / 2.0 Мбит/с ✓</a:t>
                       </a:r>
                     </a:p>
                   </a:txBody>
@@ -7581,12 +7554,12 @@
                     <a:lstStyle/>
                     <a:p>
                       <a:r>
-                        <a:rPr sz="1150">
+                        <a:rPr sz="1100" b="0">
                           <a:solidFill>
                             <a:srgbClr val="2D3748"/>
                           </a:solidFill>
                         </a:rPr>
-                        <a:t>0,8–1,7 с</a:t>
+                        <a:t>0,8–1,6 с</a:t>
                       </a:r>
                     </a:p>
                   </a:txBody>
@@ -7602,12 +7575,12 @@
                     <a:lstStyle/>
                     <a:p>
                       <a:r>
-                        <a:rPr sz="1150">
+                        <a:rPr sz="1100" b="0">
                           <a:solidFill>
                             <a:srgbClr val="2D3748"/>
                           </a:solidFill>
                         </a:rPr>
-                        <a:t>живёт, не убивается ✓</a:t>
+                        <a:t>живёт без клиентов 121+ с ✓</a:t>
                       </a:r>
                     </a:p>
                   </a:txBody>
@@ -7625,7 +7598,7 @@
                     <a:lstStyle/>
                     <a:p>
                       <a:r>
-                        <a:rPr sz="1150" b="1">
+                        <a:rPr sz="1100" b="1">
                           <a:solidFill>
                             <a:srgbClr val="2D3748"/>
                           </a:solidFill>
@@ -7646,12 +7619,12 @@
                     <a:lstStyle/>
                     <a:p>
                       <a:r>
-                        <a:rPr sz="1150">
+                        <a:rPr sz="1100" b="0">
                           <a:solidFill>
                             <a:srgbClr val="2D3748"/>
                           </a:solidFill>
                         </a:rPr>
-                        <a:t>6,5 с</a:t>
+                        <a:t>6,2 / 0,2 с</a:t>
                       </a:r>
                     </a:p>
                   </a:txBody>
@@ -7667,12 +7640,12 @@
                     <a:lstStyle/>
                     <a:p>
                       <a:r>
-                        <a:rPr sz="1150">
+                        <a:rPr sz="1100" b="0">
                           <a:solidFill>
                             <a:srgbClr val="2D3748"/>
                           </a:solidFill>
                         </a:rPr>
-                        <a:t>0,0 / 0,2 с</a:t>
+                        <a:t>0,2–1,6 с</a:t>
                       </a:r>
                     </a:p>
                   </a:txBody>
@@ -7688,12 +7661,12 @@
                     <a:lstStyle/>
                     <a:p>
                       <a:r>
-                        <a:rPr sz="1150">
+                        <a:rPr sz="1100" b="0">
                           <a:solidFill>
                             <a:srgbClr val="2D3748"/>
                           </a:solidFill>
                         </a:rPr>
-                        <a:t>0,2–1,0 с</a:t>
+                        <a:t>0.8 МБ / 0.1 Мбит/с ✓</a:t>
                       </a:r>
                     </a:p>
                   </a:txBody>
@@ -7709,12 +7682,12 @@
                     <a:lstStyle/>
                     <a:p>
                       <a:r>
-                        <a:rPr sz="1150">
+                        <a:rPr sz="1100" b="0">
                           <a:solidFill>
                             <a:srgbClr val="2D3748"/>
                           </a:solidFill>
                         </a:rPr>
-                        <a:t>0,07–4,8 с</a:t>
+                        <a:t>14.9 МБ / 2.1 Мбит/с ✓</a:t>
                       </a:r>
                     </a:p>
                   </a:txBody>
@@ -7730,12 +7703,12 @@
                     <a:lstStyle/>
                     <a:p>
                       <a:r>
-                        <a:rPr sz="1150">
+                        <a:rPr sz="1100" b="0">
                           <a:solidFill>
                             <a:srgbClr val="2D3748"/>
                           </a:solidFill>
                         </a:rPr>
-                        <a:t>0,8–1,6 с</a:t>
+                        <a:t>0,8–1,3 с</a:t>
                       </a:r>
                     </a:p>
                   </a:txBody>
@@ -7751,12 +7724,12 @@
                     <a:lstStyle/>
                     <a:p>
                       <a:r>
-                        <a:rPr sz="1150">
+                        <a:rPr sz="1100" b="0">
                           <a:solidFill>
                             <a:srgbClr val="2D3748"/>
                           </a:solidFill>
                         </a:rPr>
-                        <a:t>живёт, не убивается ✓</a:t>
+                        <a:t>живёт без клиентов 122+ с ✓</a:t>
                       </a:r>
                     </a:p>
                   </a:txBody>
@@ -7774,7 +7747,7 @@
                     <a:lstStyle/>
                     <a:p>
                       <a:r>
-                        <a:rPr sz="1150" b="1">
+                        <a:rPr sz="1100" b="1">
                           <a:solidFill>
                             <a:srgbClr val="2D3748"/>
                           </a:solidFill>
@@ -7795,12 +7768,12 @@
                     <a:lstStyle/>
                     <a:p>
                       <a:r>
-                        <a:rPr sz="1150">
+                        <a:rPr sz="1100" b="0">
                           <a:solidFill>
                             <a:srgbClr val="2D3748"/>
                           </a:solidFill>
                         </a:rPr>
-                        <a:t>6,7 с</a:t>
+                        <a:t>6,9 / 3,2 с</a:t>
                       </a:r>
                     </a:p>
                   </a:txBody>
@@ -7816,12 +7789,12 @@
                     <a:lstStyle/>
                     <a:p>
                       <a:r>
-                        <a:rPr sz="1150">
+                        <a:rPr sz="1100" b="0">
                           <a:solidFill>
                             <a:srgbClr val="2D3748"/>
                           </a:solidFill>
                         </a:rPr>
-                        <a:t>0,7 / 5,4 с</a:t>
+                        <a:t>4,0 с</a:t>
                       </a:r>
                     </a:p>
                   </a:txBody>
@@ -7837,12 +7810,12 @@
                     <a:lstStyle/>
                     <a:p>
                       <a:r>
-                        <a:rPr sz="1150">
+                        <a:rPr sz="1100" b="0">
                           <a:solidFill>
                             <a:srgbClr val="2D3748"/>
                           </a:solidFill>
                         </a:rPr>
-                        <a:t>3,9–4,0 с (GOP)</a:t>
+                        <a:t>0.8 МБ / 0.1 Мбит/с ✓</a:t>
                       </a:r>
                     </a:p>
                   </a:txBody>
@@ -7858,12 +7831,12 @@
                     <a:lstStyle/>
                     <a:p>
                       <a:r>
-                        <a:rPr sz="1150">
+                        <a:rPr sz="1100" b="0">
                           <a:solidFill>
                             <a:srgbClr val="2D3748"/>
                           </a:solidFill>
                         </a:rPr>
-                        <a:t>2,7–5,6 с</a:t>
+                        <a:t>14.6 МБ / 2.0 Мбит/с ✓</a:t>
                       </a:r>
                     </a:p>
                   </a:txBody>
@@ -7879,12 +7852,12 @@
                     <a:lstStyle/>
                     <a:p>
                       <a:r>
-                        <a:rPr sz="1150">
+                        <a:rPr sz="1100" b="0">
                           <a:solidFill>
                             <a:srgbClr val="2D3748"/>
                           </a:solidFill>
                         </a:rPr>
-                        <a:t>0,7–1,6 с</a:t>
+                        <a:t>0,8–1,6 с</a:t>
                       </a:r>
                     </a:p>
                   </a:txBody>
@@ -7900,12 +7873,12 @@
                     <a:lstStyle/>
                     <a:p>
                       <a:r>
-                        <a:rPr sz="1150">
+                        <a:rPr sz="1100" b="0">
                           <a:solidFill>
                             <a:srgbClr val="2D3748"/>
                           </a:solidFill>
                         </a:rPr>
-                        <a:t>0 воркеров через 90 с ✓</a:t>
+                        <a:t>0 воркеров через 105,9 с ✓</a:t>
                       </a:r>
                     </a:p>
                   </a:txBody>
@@ -7923,7 +7896,7 @@
                     <a:lstStyle/>
                     <a:p>
                       <a:r>
-                        <a:rPr sz="1150" b="1">
+                        <a:rPr sz="1100" b="1">
                           <a:solidFill>
                             <a:srgbClr val="2D3748"/>
                           </a:solidFill>
@@ -7944,12 +7917,12 @@
                     <a:lstStyle/>
                     <a:p>
                       <a:r>
-                        <a:rPr sz="1150">
+                        <a:rPr sz="1100" b="0">
                           <a:solidFill>
                             <a:srgbClr val="2D3748"/>
                           </a:solidFill>
                         </a:rPr>
-                        <a:t>31 с* / 6–7 с</a:t>
+                        <a:t>6,2 / 0,2 с</a:t>
                       </a:r>
                     </a:p>
                   </a:txBody>
@@ -7965,12 +7938,12 @@
                     <a:lstStyle/>
                     <a:p>
                       <a:r>
-                        <a:rPr sz="1150">
+                        <a:rPr sz="1100" b="0">
                           <a:solidFill>
                             <a:srgbClr val="2D3748"/>
                           </a:solidFill>
                         </a:rPr>
-                        <a:t>0,7 / 4,8 с</a:t>
+                        <a:t>0,2–1,7 с</a:t>
                       </a:r>
                     </a:p>
                   </a:txBody>
@@ -7986,12 +7959,12 @@
                     <a:lstStyle/>
                     <a:p>
                       <a:r>
-                        <a:rPr sz="1150">
+                        <a:rPr sz="1100" b="0">
                           <a:solidFill>
                             <a:srgbClr val="2D3748"/>
                           </a:solidFill>
                         </a:rPr>
-                        <a:t>0,2–1,0 с</a:t>
+                        <a:t>0.8 МБ / 0.1 Мбит/с ✓</a:t>
                       </a:r>
                     </a:p>
                   </a:txBody>
@@ -8007,12 +7980,12 @@
                     <a:lstStyle/>
                     <a:p>
                       <a:r>
-                        <a:rPr sz="1150">
+                        <a:rPr sz="1100" b="0">
                           <a:solidFill>
                             <a:srgbClr val="2D3748"/>
                           </a:solidFill>
                         </a:rPr>
-                        <a:t>0,06–4,9 с</a:t>
+                        <a:t>14.9 МБ / 2.1 Мбит/с ✓</a:t>
                       </a:r>
                     </a:p>
                   </a:txBody>
@@ -8028,12 +8001,12 @@
                     <a:lstStyle/>
                     <a:p>
                       <a:r>
-                        <a:rPr sz="1150">
+                        <a:rPr sz="1100" b="0">
                           <a:solidFill>
                             <a:srgbClr val="2D3748"/>
                           </a:solidFill>
                         </a:rPr>
-                        <a:t>0,8–1,6 с**</a:t>
+                        <a:t>0,7–1,7 с</a:t>
                       </a:r>
                     </a:p>
                   </a:txBody>
@@ -8049,12 +8022,12 @@
                     <a:lstStyle/>
                     <a:p>
                       <a:r>
-                        <a:rPr sz="1150">
+                        <a:rPr sz="1100" b="0">
                           <a:solidFill>
                             <a:srgbClr val="2D3748"/>
                           </a:solidFill>
                         </a:rPr>
-                        <a:t>0 воркеров через 90 с ✓</a:t>
+                        <a:t>0 воркеров через 95,7 с ✓</a:t>
                       </a:r>
                     </a:p>
                   </a:txBody>
@@ -8091,13 +8064,8 @@
           </a:bodyPr>
           <a:lstStyle/>
           <a:p>
-            <a:pPr>
-              <a:spcAft>
-                <a:spcPts val="500"/>
-              </a:spcAft>
-            </a:pPr>
-            <a:r>
-              <a:rPr sz="1500" b="1">
+            <a:r>
+              <a:rPr sz="1500">
                 <a:solidFill>
                   <a:srgbClr val="2563EB"/>
                 </a:solidFill>
@@ -8106,36 +8074,18 @@
             </a:r>
           </a:p>
           <a:p>
-            <a:pPr>
-              <a:spcAft>
-                <a:spcPts val="500"/>
-              </a:spcAft>
-            </a:pPr>
-            <a:r>
-              <a:rPr sz="1250" b="0">
-                <a:solidFill>
-                  <a:srgbClr val="2D3748"/>
-                </a:solidFill>
-              </a:rPr>
-              <a:t>• Доменные цифры: pace не меняет GOP (~4 с) — он сглаживает доставку; /frame тёплый в pace=0 = 0,2–1 с, в pace=1 = 3,9–4 с
-• idle + /prime = сценарий домофона: звонок → prime 0,7 с → frame ~5 с → через 90 с тишины трафик с облака останавливается (проверено: воркеры убиваются)
-• always = «посмотрели в любой момент»: любой запрос тёплый, цена — постоянный трафик (main ~18 ГБ/день на камеру)
-• параллельные запросы (frame+stream+snap) и гонка 2×/frame во всех 4 комбинациях — 0 сбоев</a:t>
-            </a:r>
-          </a:p>
-          <a:p>
-            <a:pPr>
-              <a:spcAft>
-                <a:spcPts val="600"/>
-              </a:spcAft>
-            </a:pPr>
-            <a:r>
-              <a:rPr sz="1100" b="0">
-                <a:solidFill>
-                  <a:srgbClr val="647084"/>
-                </a:solidFill>
-              </a:rPr>
-              <a:t>* D: первый после рестарта сервиса — 31 с (логин в облако + открытие VTM с нуля); последующие холодные — 6–7 с.   ** D: один snapshot 30 с таймаут — временный сбой облака, повтор 0,96 с (ретраи в облачном API).</a:t>
+            <a:r>
+              <a:rPr sz="1200"/>
+              <a:t>• pace не меняет GOP (~4 с) — он сглаживает доставку: /frame тёплый в pace=0 = 0,2–1,7 с, в pace=1 = ~4,0 с (стабильно по 5 замерам)
+• 60-секундные потоки во всех 4 комбинациях — валидный MPEG-TS без обрывов: sub ~0,8 МБ (~0,1 Мбит/с), main ~14,8 МБ (~2,1 Мбит/с, HEVC 1080p)
+• reaper честный: в idle воркеры убиваются через ~96–106 с без клиентов (0 в списке), в always живут 120+ с — режим реально переключает цену трафика
+• 4 параллельных запроса (frame + stream main + stream sub + snapshot) одновременно во всех 4 комбинациях — 0 сбоев; /prime (триггер звонка): 1,2 с → frame 0,5 с</a:t>
+            </a:r>
+          </a:p>
+          <a:p>
+            <a:r>
+              <a:rPr sz="1100"/>
+              <a:t>cold-кадр: 1-й 6–8 с (подъём воркера), 2-й уже 0,2–3,2 с. Данные — долгий прогон 18.10: на комбинацию рестарт сервиса + frame×7 + потоки sub/main по 60 с + snapshot×3 + reaper + параллельная четвёрка.</a:t>
             </a:r>
           </a:p>
         </p:txBody>

--- a/hikcloud2rtc.pptx
+++ b/hikcloud2rtc.pptx
@@ -17,6 +17,7 @@
     <p:sldId id="265" r:id="rId16"/>
     <p:sldId id="266" r:id="rId17"/>
     <p:sldId id="267" r:id="rId18"/>
+    <p:sldId id="272" r:id="rId23"/>
     <p:sldId id="269" r:id="rId20"/>
     <p:sldId id="270" r:id="rId21"/>
     <p:sldId id="268" r:id="rId19"/>
@@ -8086,6 +8087,497 @@
             <a:r>
               <a:rPr sz="1100"/>
               <a:t>cold-кадр: 1-й 6–8 с (подъём воркера), 2-й уже 0,2–3,2 с. Данные — долгий прогон 18.10: на комбинацию рестарт сервиса + frame×7 + потоки sub/main по 60 с + snapshot×3 + reaper + параллельная четвёрка.</a:t>
+            </a:r>
+          </a:p>
+        </p:txBody>
+      </p:sp>
+    </p:spTree>
+  </p:cSld>
+  <p:clrMapOvr>
+    <a:masterClrMapping/>
+  </p:clrMapOvr>
+</p:sld>
+</file>
+
+<file path=ppt/slides/slide17.xml><?xml version="1.0" encoding="utf-8"?>
+<p:sld xmlns:a="http://schemas.openxmlformats.org/drawingml/2006/main" xmlns:p="http://schemas.openxmlformats.org/presentationml/2006/main" xmlns:r="http://schemas.openxmlformats.org/officeDocument/2006/relationships">
+  <p:cSld>
+    <p:spTree>
+      <p:nvGrpSpPr>
+        <p:cNvPr id="1" name=""/>
+        <p:cNvGrpSpPr/>
+        <p:nvPr/>
+      </p:nvGrpSpPr>
+      <p:grpSpPr/>
+      <p:sp>
+        <p:nvSpPr>
+          <p:cNvPr id="2" name="Rectangle 1"/>
+          <p:cNvSpPr/>
+          <p:nvPr/>
+        </p:nvSpPr>
+        <p:spPr>
+          <a:xfrm>
+            <a:off x="0" y="0"/>
+            <a:ext cx="12188952" cy="1051560"/>
+          </a:xfrm>
+          <a:prstGeom prst="rect">
+            <a:avLst/>
+          </a:prstGeom>
+          <a:solidFill>
+            <a:srgbClr val="142033"/>
+          </a:solidFill>
+          <a:ln>
+            <a:noFill/>
+          </a:ln>
+          <a:effectLst/>
+        </p:spPr>
+        <p:style>
+          <a:lnRef idx="1">
+            <a:schemeClr val="accent1"/>
+          </a:lnRef>
+          <a:fillRef idx="3">
+            <a:schemeClr val="accent1"/>
+          </a:fillRef>
+          <a:effectRef idx="2">
+            <a:schemeClr val="accent1"/>
+          </a:effectRef>
+          <a:fontRef idx="minor">
+            <a:schemeClr val="lt1"/>
+          </a:fontRef>
+        </p:style>
+        <p:txBody>
+          <a:bodyPr rtlCol="0" anchor="ctr"/>
+          <a:lstStyle/>
+          <a:p>
+            <a:pPr algn="ctr"/>
+          </a:p>
+        </p:txBody>
+      </p:sp>
+      <p:sp>
+        <p:nvSpPr>
+          <p:cNvPr id="3" name="TextBox 2"/>
+          <p:cNvSpPr txBox="1"/>
+          <p:nvPr/>
+        </p:nvSpPr>
+        <p:spPr>
+          <a:xfrm>
+            <a:off x="640080" y="128016"/>
+            <a:ext cx="10515600" cy="274320"/>
+          </a:xfrm>
+          <a:prstGeom prst="rect">
+            <a:avLst/>
+          </a:prstGeom>
+          <a:noFill/>
+        </p:spPr>
+        <p:txBody>
+          <a:bodyPr wrap="square" anchor="t" lIns="0" rIns="0" tIns="0" bIns="0">
+            <a:spAutoFit/>
+          </a:bodyPr>
+          <a:lstStyle/>
+          <a:p>
+            <a:pPr algn="l"/>
+            <a:r>
+              <a:rPr sz="1100" b="1">
+                <a:solidFill>
+                  <a:srgbClr val="7FB2E8"/>
+                </a:solidFill>
+              </a:rPr>
+              <a:t>Проверка в проде</a:t>
+            </a:r>
+          </a:p>
+        </p:txBody>
+      </p:sp>
+      <p:sp>
+        <p:nvSpPr>
+          <p:cNvPr id="4" name="TextBox 3"/>
+          <p:cNvSpPr txBox="1"/>
+          <p:nvPr/>
+        </p:nvSpPr>
+        <p:spPr>
+          <a:xfrm>
+            <a:off x="640080" y="384048"/>
+            <a:ext cx="10881360" cy="640080"/>
+          </a:xfrm>
+          <a:prstGeom prst="rect">
+            <a:avLst/>
+          </a:prstGeom>
+          <a:noFill/>
+        </p:spPr>
+        <p:txBody>
+          <a:bodyPr wrap="square" anchor="t" lIns="0" rIns="0" tIns="0" bIns="0">
+            <a:spAutoFit/>
+          </a:bodyPr>
+          <a:lstStyle/>
+          <a:p>
+            <a:pPr algn="l"/>
+            <a:r>
+              <a:rPr sz="2700" b="1">
+                <a:solidFill>
+                  <a:srgbClr val="FFFFFF"/>
+                </a:solidFill>
+              </a:rPr>
+              <a:t>Сетка всех камер одним кадром: /preview</a:t>
+            </a:r>
+          </a:p>
+        </p:txBody>
+      </p:sp>
+      <p:sp>
+        <p:nvSpPr>
+          <p:cNvPr id="5" name="Rectangle 4"/>
+          <p:cNvSpPr/>
+          <p:nvPr/>
+        </p:nvSpPr>
+        <p:spPr>
+          <a:xfrm>
+            <a:off x="658368" y="1051560"/>
+            <a:ext cx="1463040" cy="45720"/>
+          </a:xfrm>
+          <a:prstGeom prst="rect">
+            <a:avLst/>
+          </a:prstGeom>
+          <a:solidFill>
+            <a:srgbClr val="2E86DE"/>
+          </a:solidFill>
+          <a:ln>
+            <a:noFill/>
+          </a:ln>
+          <a:effectLst/>
+        </p:spPr>
+        <p:style>
+          <a:lnRef idx="1">
+            <a:schemeClr val="accent1"/>
+          </a:lnRef>
+          <a:fillRef idx="3">
+            <a:schemeClr val="accent1"/>
+          </a:fillRef>
+          <a:effectRef idx="2">
+            <a:schemeClr val="accent1"/>
+          </a:effectRef>
+          <a:fontRef idx="minor">
+            <a:schemeClr val="lt1"/>
+          </a:fontRef>
+        </p:style>
+        <p:txBody>
+          <a:bodyPr rtlCol="0" anchor="ctr"/>
+          <a:lstStyle/>
+          <a:p>
+            <a:pPr algn="ctr"/>
+          </a:p>
+        </p:txBody>
+      </p:sp>
+      <p:sp>
+        <p:nvSpPr>
+          <p:cNvPr id="6" name="Rounded Rectangle 5"/>
+          <p:cNvSpPr/>
+          <p:nvPr/>
+        </p:nvSpPr>
+        <p:spPr>
+          <a:xfrm>
+            <a:off x="640080" y="1325880"/>
+            <a:ext cx="5577840" cy="5349240"/>
+          </a:xfrm>
+          <a:prstGeom prst="roundRect">
+            <a:avLst/>
+          </a:prstGeom>
+          <a:solidFill>
+            <a:srgbClr val="0D1522"/>
+          </a:solidFill>
+          <a:ln>
+            <a:noFill/>
+          </a:ln>
+          <a:effectLst/>
+        </p:spPr>
+        <p:style>
+          <a:lnRef idx="1">
+            <a:schemeClr val="accent1"/>
+          </a:lnRef>
+          <a:fillRef idx="3">
+            <a:schemeClr val="accent1"/>
+          </a:fillRef>
+          <a:effectRef idx="2">
+            <a:schemeClr val="accent1"/>
+          </a:effectRef>
+          <a:fontRef idx="minor">
+            <a:schemeClr val="lt1"/>
+          </a:fontRef>
+        </p:style>
+        <p:txBody>
+          <a:bodyPr rtlCol="0" anchor="ctr"/>
+          <a:lstStyle/>
+          <a:p>
+            <a:pPr algn="ctr"/>
+          </a:p>
+        </p:txBody>
+      </p:sp>
+      <p:pic>
+        <p:nvPicPr>
+          <p:cNvPr id="7" name="Picture 6" descr="preview_prod.jpg"/>
+          <p:cNvPicPr>
+            <a:picLocks noChangeAspect="1"/>
+          </p:cNvPicPr>
+          <p:nvPr/>
+        </p:nvPicPr>
+        <p:blipFill>
+          <a:blip r:embed="rId2"/>
+          <a:stretch>
+            <a:fillRect/>
+          </a:stretch>
+        </p:blipFill>
+        <p:spPr>
+          <a:xfrm>
+            <a:off x="777240" y="1463040"/>
+            <a:ext cx="5303520" cy="4599146"/>
+          </a:xfrm>
+          <a:prstGeom prst="rect">
+            <a:avLst/>
+          </a:prstGeom>
+        </p:spPr>
+      </p:pic>
+      <p:sp>
+        <p:nvSpPr>
+          <p:cNvPr id="8" name="TextBox 7"/>
+          <p:cNvSpPr txBox="1"/>
+          <p:nvPr/>
+        </p:nvSpPr>
+        <p:spPr>
+          <a:xfrm>
+            <a:off x="6446520" y="1463040"/>
+            <a:ext cx="5212080" cy="320040"/>
+          </a:xfrm>
+          <a:prstGeom prst="rect">
+            <a:avLst/>
+          </a:prstGeom>
+          <a:noFill/>
+        </p:spPr>
+        <p:txBody>
+          <a:bodyPr wrap="square" anchor="t" lIns="0" rIns="0" tIns="0" bIns="0">
+            <a:spAutoFit/>
+          </a:bodyPr>
+          <a:lstStyle/>
+          <a:p>
+            <a:pPr algn="l"/>
+            <a:r>
+              <a:rPr sz="1250" b="1">
+                <a:solidFill>
+                  <a:srgbClr val="FFFFFF"/>
+                </a:solidFill>
+              </a:rPr>
+              <a:t>GET /preview?cell=320&amp;workers=8&amp;quality=88</a:t>
+            </a:r>
+          </a:p>
+        </p:txBody>
+      </p:sp>
+      <p:sp>
+        <p:nvSpPr>
+          <p:cNvPr id="9" name="TextBox 8"/>
+          <p:cNvSpPr txBox="1"/>
+          <p:nvPr/>
+        </p:nvSpPr>
+        <p:spPr>
+          <a:xfrm>
+            <a:off x="6446520" y="1965960"/>
+            <a:ext cx="5212080" cy="4480560"/>
+          </a:xfrm>
+          <a:prstGeom prst="rect">
+            <a:avLst/>
+          </a:prstGeom>
+          <a:noFill/>
+        </p:spPr>
+        <p:txBody>
+          <a:bodyPr wrap="square" anchor="t" lIns="0" rIns="0" tIns="0" bIns="0">
+            <a:spAutoFit/>
+          </a:bodyPr>
+          <a:lstStyle/>
+          <a:p>
+            <a:pPr algn="l">
+              <a:spcAft>
+                <a:spcPts val="1000"/>
+              </a:spcAft>
+            </a:pPr>
+            <a:r>
+              <a:rPr sz="1150" b="1">
+                <a:solidFill>
+                  <a:srgbClr val="1B5EB0"/>
+                </a:solidFill>
+              </a:rPr>
+              <a:t>Авто-раскладка</a:t>
+            </a:r>
+            <a:r>
+              <a:rPr sz="1150" b="0">
+                <a:solidFill>
+                  <a:srgbClr val="4A5568"/>
+                </a:solidFill>
+              </a:rPr>
+              <a:t> под число камер: 16 → 4×4, 12 → 4×3, 10 → 5×2, 8 → 4×2 — равномерная, без «хвоста» из одиночных ячеек</a:t>
+            </a:r>
+          </a:p>
+          <a:p>
+            <a:pPr algn="l">
+              <a:spcAft>
+                <a:spcPts val="1000"/>
+              </a:spcAft>
+            </a:pPr>
+            <a:r>
+              <a:rPr sz="1150" b="1">
+                <a:solidFill>
+                  <a:srgbClr val="1B5EB0"/>
+                </a:solidFill>
+              </a:rPr>
+              <a:t>NO SIGNAL</a:t>
+            </a:r>
+            <a:r>
+              <a:rPr sz="1150" b="0">
+                <a:solidFill>
+                  <a:srgbClr val="4A5568"/>
+                </a:solidFill>
+              </a:rPr>
+              <a:t> вместо недоступных: оффлайн-камеры не выкидываются — видно, какие каналы молчат, на фоне живых кадров</a:t>
+            </a:r>
+          </a:p>
+          <a:p>
+            <a:pPr algn="l">
+              <a:spcAft>
+                <a:spcPts val="1000"/>
+              </a:spcAft>
+            </a:pPr>
+            <a:r>
+              <a:rPr sz="1150" b="1">
+                <a:solidFill>
+                  <a:srgbClr val="1B5EB0"/>
+                </a:solidFill>
+              </a:rPr>
+              <a:t>Шапка и подписи</a:t>
+            </a:r>
+            <a:r>
+              <a:rPr sz="1150" b="0">
+                <a:solidFill>
+                  <a:srgbClr val="4A5568"/>
+                </a:solidFill>
+              </a:rPr>
+              <a:t> — название NVR, время снимка, «онлайн N/M»; под ячейкой CH N + имя камеры (длинные — с многоточием)</a:t>
+            </a:r>
+          </a:p>
+          <a:p>
+            <a:pPr algn="l">
+              <a:spcAft>
+                <a:spcPts val="600"/>
+              </a:spcAft>
+            </a:pPr>
+            <a:r>
+              <a:rPr sz="1150" b="1">
+                <a:solidFill>
+                  <a:srgbClr val="1B5EB0"/>
+                </a:solidFill>
+              </a:rPr>
+              <a:t>Время ответа</a:t>
+            </a:r>
+            <a:r>
+              <a:rPr sz="1150" b="0">
+                <a:solidFill>
+                  <a:srgbClr val="4A5568"/>
+                </a:solidFill>
+              </a:rPr>
+              <a:t> складывается из времени получения снапшотов (рендер сетки &lt;0,1 с): снапшоты снимаются параллельно, время = самый медленный</a:t>
+            </a:r>
+          </a:p>
+          <a:p>
+            <a:pPr algn="l">
+              <a:spcAft>
+                <a:spcPts val="1000"/>
+              </a:spcAft>
+            </a:pPr>
+            <a:r>
+              <a:rPr sz="1150" b="1">
+                <a:solidFill>
+                  <a:srgbClr val="1B5EB0"/>
+                </a:solidFill>
+              </a:rPr>
+              <a:t>онлайн-камера ~1,5 с</a:t>
+            </a:r>
+            <a:r>
+              <a:rPr sz="1150" b="0">
+                <a:solidFill>
+                  <a:srgbClr val="4A5568"/>
+                </a:solidFill>
+              </a:rPr>
+              <a:t>; </a:t>
+            </a:r>
+            <a:r>
+              <a:rPr sz="1150" b="1">
+                <a:solidFill>
+                  <a:srgbClr val="1B5EB0"/>
+                </a:solidFill>
+              </a:rPr>
+              <a:t>оффлайн ~20 с</a:t>
+            </a:r>
+            <a:r>
+              <a:rPr sz="1150" b="0">
+                <a:solidFill>
+                  <a:srgbClr val="4A5568"/>
+                </a:solidFill>
+              </a:rPr>
+              <a:t> (облако отвечает 502 только после долгого ожидания) → 16 камер: </a:t>
+            </a:r>
+            <a:r>
+              <a:rPr sz="1150" b="1">
+                <a:solidFill>
+                  <a:srgbClr val="1B5EB0"/>
+                </a:solidFill>
+              </a:rPr>
+              <a:t>~24 с</a:t>
+            </a:r>
+          </a:p>
+          <a:p>
+            <a:pPr algn="l"/>
+            <a:r>
+              <a:rPr sz="1150" b="1">
+                <a:solidFill>
+                  <a:srgbClr val="1B5EB0"/>
+                </a:solidFill>
+              </a:rPr>
+              <a:t>Доступно из браузера</a:t>
+            </a:r>
+            <a:r>
+              <a:rPr sz="1150" b="0">
+                <a:solidFill>
+                  <a:srgbClr val="4A5568"/>
+                </a:solidFill>
+              </a:rPr>
+              <a:t>: &lt;img src="http://&lt;host&gt;:8000/preview"&gt; — дашборд стенда одной ссылкой</a:t>
+            </a:r>
+          </a:p>
+        </p:txBody>
+      </p:sp>
+      <p:sp>
+        <p:nvSpPr>
+          <p:cNvPr id="10" name="TextBox 9"/>
+          <p:cNvSpPr txBox="1"/>
+          <p:nvPr/>
+        </p:nvSpPr>
+        <p:spPr>
+          <a:xfrm>
+            <a:off x="640080" y="6355080"/>
+            <a:ext cx="10881360" cy="365760"/>
+          </a:xfrm>
+          <a:prstGeom prst="rect">
+            <a:avLst/>
+          </a:prstGeom>
+          <a:noFill/>
+        </p:spPr>
+        <p:txBody>
+          <a:bodyPr wrap="square" anchor="t" lIns="0" rIns="0" tIns="0" bIns="0">
+            <a:spAutoFit/>
+          </a:bodyPr>
+          <a:lstStyle/>
+          <a:p>
+            <a:pPr algn="l"/>
+            <a:r>
+              <a:rPr sz="1200" b="1">
+                <a:solidFill>
+                  <a:srgbClr val="2E7D4F"/>
+                </a:solidFill>
+              </a:rPr>
+              <a:t>Реальный вывод из прода: 10 онлайн + 6 NO SIGNAL  •  JPEG ~350 КБ  •  commit 2139055</a:t>
             </a:r>
           </a:p>
         </p:txBody>

--- a/hikcloud2rtc.pptx
+++ b/hikcloud2rtc.pptx
@@ -5684,6 +5684,501 @@
 </file>
 
 <file path=ppt/slides/slide13.xml><?xml version="1.0" encoding="utf-8"?>
+<p:sld xmlns:a="http://schemas.openxmlformats.org/drawingml/2006/main" xmlns:p="http://schemas.openxmlformats.org/presentationml/2006/main" xmlns:r="http://schemas.openxmlformats.org/officeDocument/2006/relationships">
+  <p:cSld>
+    <p:spTree>
+      <p:nvGrpSpPr>
+        <p:cNvPr id="1" name=""/>
+        <p:cNvGrpSpPr/>
+        <p:nvPr/>
+      </p:nvGrpSpPr>
+      <p:grpSpPr/>
+      <p:sp>
+        <p:nvSpPr>
+          <p:cNvPr id="2" name="Rectangle 1"/>
+          <p:cNvSpPr/>
+          <p:nvPr/>
+        </p:nvSpPr>
+        <p:spPr>
+          <a:xfrm>
+            <a:off x="0" y="0"/>
+            <a:ext cx="12188952" cy="1051560"/>
+          </a:xfrm>
+          <a:prstGeom prst="rect">
+            <a:avLst/>
+          </a:prstGeom>
+          <a:solidFill>
+            <a:srgbClr val="142033"/>
+          </a:solidFill>
+          <a:ln>
+            <a:noFill/>
+          </a:ln>
+          <a:effectLst/>
+        </p:spPr>
+        <p:style>
+          <a:lnRef idx="1">
+            <a:schemeClr val="accent1"/>
+          </a:lnRef>
+          <a:fillRef idx="3">
+            <a:schemeClr val="accent1"/>
+          </a:fillRef>
+          <a:effectRef idx="2">
+            <a:schemeClr val="accent1"/>
+          </a:effectRef>
+          <a:fontRef idx="minor">
+            <a:schemeClr val="lt1"/>
+          </a:fontRef>
+        </p:style>
+        <p:txBody>
+          <a:bodyPr rtlCol="0" anchor="ctr"/>
+          <a:lstStyle/>
+          <a:p>
+            <a:pPr algn="ctr"/>
+          </a:p>
+        </p:txBody>
+      </p:sp>
+      <p:sp>
+        <p:nvSpPr>
+          <p:cNvPr id="3" name="TextBox 2"/>
+          <p:cNvSpPr txBox="1"/>
+          <p:nvPr/>
+        </p:nvSpPr>
+        <p:spPr>
+          <a:xfrm>
+            <a:off x="640080" y="128016"/>
+            <a:ext cx="10515600" cy="274320"/>
+          </a:xfrm>
+          <a:prstGeom prst="rect">
+            <a:avLst/>
+          </a:prstGeom>
+          <a:noFill/>
+        </p:spPr>
+        <p:txBody>
+          <a:bodyPr wrap="square" anchor="t" lIns="0" rIns="0" tIns="0" bIns="0">
+            <a:spAutoFit/>
+          </a:bodyPr>
+          <a:lstStyle/>
+          <a:p>
+            <a:pPr algn="l"/>
+            <a:r>
+              <a:rPr sz="1100" b="1">
+                <a:solidFill>
+                  <a:srgbClr val="7FB2E8"/>
+                </a:solidFill>
+              </a:rPr>
+              <a:t>Проверка в проде</a:t>
+            </a:r>
+          </a:p>
+        </p:txBody>
+      </p:sp>
+      <p:sp>
+        <p:nvSpPr>
+          <p:cNvPr id="4" name="TextBox 3"/>
+          <p:cNvSpPr txBox="1"/>
+          <p:nvPr/>
+        </p:nvSpPr>
+        <p:spPr>
+          <a:xfrm>
+            <a:off x="640080" y="384048"/>
+            <a:ext cx="10881360" cy="640080"/>
+          </a:xfrm>
+          <a:prstGeom prst="rect">
+            <a:avLst/>
+          </a:prstGeom>
+          <a:noFill/>
+        </p:spPr>
+        <p:txBody>
+          <a:bodyPr wrap="square" anchor="t" lIns="0" rIns="0" tIns="0" bIns="0">
+            <a:spAutoFit/>
+          </a:bodyPr>
+          <a:lstStyle/>
+          <a:p>
+            <a:pPr algn="l"/>
+            <a:r>
+              <a:rPr sz="2700" b="1">
+                <a:solidFill>
+                  <a:srgbClr val="FFFFFF"/>
+                </a:solidFill>
+              </a:rPr>
+              <a:t>Сетка всех камер одним кадром: /preview</a:t>
+            </a:r>
+          </a:p>
+        </p:txBody>
+      </p:sp>
+      <p:sp>
+        <p:nvSpPr>
+          <p:cNvPr id="5" name="Rectangle 4"/>
+          <p:cNvSpPr/>
+          <p:nvPr/>
+        </p:nvSpPr>
+        <p:spPr>
+          <a:xfrm>
+            <a:off x="658368" y="1051560"/>
+            <a:ext cx="1463040" cy="45720"/>
+          </a:xfrm>
+          <a:prstGeom prst="rect">
+            <a:avLst/>
+          </a:prstGeom>
+          <a:solidFill>
+            <a:srgbClr val="2E86DE"/>
+          </a:solidFill>
+          <a:ln>
+            <a:noFill/>
+          </a:ln>
+          <a:effectLst/>
+        </p:spPr>
+        <p:style>
+          <a:lnRef idx="1">
+            <a:schemeClr val="accent1"/>
+          </a:lnRef>
+          <a:fillRef idx="3">
+            <a:schemeClr val="accent1"/>
+          </a:fillRef>
+          <a:effectRef idx="2">
+            <a:schemeClr val="accent1"/>
+          </a:effectRef>
+          <a:fontRef idx="minor">
+            <a:schemeClr val="lt1"/>
+          </a:fontRef>
+        </p:style>
+        <p:txBody>
+          <a:bodyPr rtlCol="0" anchor="ctr"/>
+          <a:lstStyle/>
+          <a:p>
+            <a:pPr algn="ctr"/>
+          </a:p>
+        </p:txBody>
+      </p:sp>
+      <p:sp>
+        <p:nvSpPr>
+          <p:cNvPr id="6" name="Rounded Rectangle 5"/>
+          <p:cNvSpPr/>
+          <p:nvPr/>
+        </p:nvSpPr>
+        <p:spPr>
+          <a:xfrm>
+            <a:off x="640080" y="1325880"/>
+            <a:ext cx="6675120" cy="5120640"/>
+          </a:xfrm>
+          <a:prstGeom prst="roundRect">
+            <a:avLst>
+              <a:gd name="adj" fmla="val 3000"/>
+            </a:avLst>
+          </a:prstGeom>
+          <a:solidFill>
+            <a:srgbClr val="0D1522"/>
+          </a:solidFill>
+          <a:ln w="9525">
+            <a:solidFill>
+              <a:srgbClr val="FFFFFF"/>
+            </a:solidFill>
+          </a:ln>
+          <a:effectLst/>
+        </p:spPr>
+        <p:style>
+          <a:lnRef idx="1">
+            <a:schemeClr val="accent1"/>
+          </a:lnRef>
+          <a:fillRef idx="3">
+            <a:schemeClr val="accent1"/>
+          </a:fillRef>
+          <a:effectRef idx="2">
+            <a:schemeClr val="accent1"/>
+          </a:effectRef>
+          <a:fontRef idx="minor">
+            <a:schemeClr val="lt1"/>
+          </a:fontRef>
+        </p:style>
+        <p:txBody>
+          <a:bodyPr rtlCol="0" anchor="ctr"/>
+          <a:lstStyle/>
+          <a:p>
+            <a:pPr algn="ctr"/>
+          </a:p>
+        </p:txBody>
+      </p:sp>
+      <p:pic>
+        <p:nvPicPr>
+          <p:cNvPr id="7" name="Picture 6" descr="preview_prod.jpg"/>
+          <p:cNvPicPr>
+            <a:picLocks noChangeAspect="1"/>
+          </p:cNvPicPr>
+          <p:nvPr/>
+        </p:nvPicPr>
+        <p:blipFill>
+          <a:blip r:embed="rId2"/>
+          <a:stretch>
+            <a:fillRect/>
+          </a:stretch>
+        </p:blipFill>
+        <p:spPr>
+          <a:xfrm>
+            <a:off x="1152144" y="1435608"/>
+            <a:ext cx="5650992" cy="4901184"/>
+          </a:xfrm>
+          <a:prstGeom prst="rect">
+            <a:avLst/>
+          </a:prstGeom>
+        </p:spPr>
+      </p:pic>
+      <p:sp>
+        <p:nvSpPr>
+          <p:cNvPr id="8" name="TextBox 7"/>
+          <p:cNvSpPr txBox="1"/>
+          <p:nvPr/>
+        </p:nvSpPr>
+        <p:spPr>
+          <a:xfrm>
+            <a:off x="7543800" y="1463040"/>
+            <a:ext cx="4005072" cy="320040"/>
+          </a:xfrm>
+          <a:prstGeom prst="rect">
+            <a:avLst/>
+          </a:prstGeom>
+          <a:noFill/>
+        </p:spPr>
+        <p:txBody>
+          <a:bodyPr wrap="square" anchor="t" lIns="0" rIns="0" tIns="0" bIns="0">
+            <a:spAutoFit/>
+          </a:bodyPr>
+          <a:lstStyle/>
+          <a:p>
+            <a:pPr algn="l"/>
+            <a:r>
+              <a:rPr sz="1250" b="1">
+                <a:solidFill>
+                  <a:srgbClr val="FFFFFF"/>
+                </a:solidFill>
+              </a:rPr>
+              <a:t>GET /preview?cell=320&amp;workers=8&amp;quality=88</a:t>
+            </a:r>
+          </a:p>
+        </p:txBody>
+      </p:sp>
+      <p:sp>
+        <p:nvSpPr>
+          <p:cNvPr id="9" name="TextBox 8"/>
+          <p:cNvSpPr txBox="1"/>
+          <p:nvPr/>
+        </p:nvSpPr>
+        <p:spPr>
+          <a:xfrm>
+            <a:off x="7543800" y="1965960"/>
+            <a:ext cx="4005072" cy="4480560"/>
+          </a:xfrm>
+          <a:prstGeom prst="rect">
+            <a:avLst/>
+          </a:prstGeom>
+          <a:noFill/>
+        </p:spPr>
+        <p:txBody>
+          <a:bodyPr wrap="square" anchor="t" lIns="0" rIns="0" tIns="0" bIns="0">
+            <a:spAutoFit/>
+          </a:bodyPr>
+          <a:lstStyle/>
+          <a:p>
+            <a:pPr algn="l">
+              <a:spcAft>
+                <a:spcPts val="1000"/>
+              </a:spcAft>
+            </a:pPr>
+            <a:r>
+              <a:rPr sz="1150" b="1">
+                <a:solidFill>
+                  <a:srgbClr val="1B5EB0"/>
+                </a:solidFill>
+              </a:rPr>
+              <a:t>Авто-раскладка</a:t>
+            </a:r>
+            <a:r>
+              <a:rPr sz="1150" b="0">
+                <a:solidFill>
+                  <a:srgbClr val="4A5568"/>
+                </a:solidFill>
+              </a:rPr>
+              <a:t> под число камер: 16 → 4×4, 12 → 4×3, 10 → 5×2, 8 → 4×2 — равномерная, без «хвоста» из одиночных ячеек</a:t>
+            </a:r>
+          </a:p>
+          <a:p>
+            <a:pPr algn="l">
+              <a:spcAft>
+                <a:spcPts val="1000"/>
+              </a:spcAft>
+            </a:pPr>
+            <a:r>
+              <a:rPr sz="1150" b="1">
+                <a:solidFill>
+                  <a:srgbClr val="1B5EB0"/>
+                </a:solidFill>
+              </a:rPr>
+              <a:t>NO SIGNAL</a:t>
+            </a:r>
+            <a:r>
+              <a:rPr sz="1150" b="0">
+                <a:solidFill>
+                  <a:srgbClr val="4A5568"/>
+                </a:solidFill>
+              </a:rPr>
+              <a:t> вместо недоступных: оффлайн-камеры не выкидываются — видно, какие каналы молчат, на фоне живых кадров</a:t>
+            </a:r>
+          </a:p>
+          <a:p>
+            <a:pPr algn="l">
+              <a:spcAft>
+                <a:spcPts val="1000"/>
+              </a:spcAft>
+            </a:pPr>
+            <a:r>
+              <a:rPr sz="1150" b="1">
+                <a:solidFill>
+                  <a:srgbClr val="1B5EB0"/>
+                </a:solidFill>
+              </a:rPr>
+              <a:t>Шапка и подписи</a:t>
+            </a:r>
+            <a:r>
+              <a:rPr sz="1150" b="0">
+                <a:solidFill>
+                  <a:srgbClr val="4A5568"/>
+                </a:solidFill>
+              </a:rPr>
+              <a:t> — название NVR, время снимка, «онлайн N/M»; под ячейкой CH N + имя камеры (длинные — с многоточием)</a:t>
+            </a:r>
+          </a:p>
+          <a:p>
+            <a:pPr algn="l">
+              <a:spcAft>
+                <a:spcPts val="600"/>
+              </a:spcAft>
+            </a:pPr>
+            <a:r>
+              <a:rPr sz="1150" b="1">
+                <a:solidFill>
+                  <a:srgbClr val="1B5EB0"/>
+                </a:solidFill>
+              </a:rPr>
+              <a:t>Время ответа</a:t>
+            </a:r>
+            <a:r>
+              <a:rPr sz="1150" b="0">
+                <a:solidFill>
+                  <a:srgbClr val="4A5568"/>
+                </a:solidFill>
+              </a:rPr>
+              <a:t> складывается из времени получения снапшотов (рендер сетки &lt;0,1 с): снапшоты снимаются параллельно, время = самый медленный</a:t>
+            </a:r>
+          </a:p>
+          <a:p>
+            <a:pPr algn="l">
+              <a:spcAft>
+                <a:spcPts val="1000"/>
+              </a:spcAft>
+            </a:pPr>
+            <a:r>
+              <a:rPr sz="1150" b="1">
+                <a:solidFill>
+                  <a:srgbClr val="1B5EB0"/>
+                </a:solidFill>
+              </a:rPr>
+              <a:t>онлайн-камера ~1,5 с</a:t>
+            </a:r>
+            <a:r>
+              <a:rPr sz="1150" b="0">
+                <a:solidFill>
+                  <a:srgbClr val="4A5568"/>
+                </a:solidFill>
+              </a:rPr>
+              <a:t>; </a:t>
+            </a:r>
+            <a:r>
+              <a:rPr sz="1150" b="1">
+                <a:solidFill>
+                  <a:srgbClr val="1B5EB0"/>
+                </a:solidFill>
+              </a:rPr>
+              <a:t>оффлайн ~20 с</a:t>
+            </a:r>
+            <a:r>
+              <a:rPr sz="1150" b="0">
+                <a:solidFill>
+                  <a:srgbClr val="4A5568"/>
+                </a:solidFill>
+              </a:rPr>
+              <a:t> (облако отвечает 502 только после долгого ожидания) → 16 камер: </a:t>
+            </a:r>
+            <a:r>
+              <a:rPr sz="1150" b="1">
+                <a:solidFill>
+                  <a:srgbClr val="1B5EB0"/>
+                </a:solidFill>
+              </a:rPr>
+              <a:t>~24 с</a:t>
+            </a:r>
+          </a:p>
+          <a:p>
+            <a:pPr algn="l"/>
+            <a:r>
+              <a:rPr sz="1150" b="1">
+                <a:solidFill>
+                  <a:srgbClr val="1B5EB0"/>
+                </a:solidFill>
+              </a:rPr>
+              <a:t>Доступно из браузера</a:t>
+            </a:r>
+            <a:r>
+              <a:rPr sz="1150" b="0">
+                <a:solidFill>
+                  <a:srgbClr val="4A5568"/>
+                </a:solidFill>
+              </a:rPr>
+              <a:t>: &lt;img src="http://&lt;host&gt;:8000/preview"&gt; — дашборд стенда одной ссылкой</a:t>
+            </a:r>
+          </a:p>
+        </p:txBody>
+      </p:sp>
+      <p:sp>
+        <p:nvSpPr>
+          <p:cNvPr id="10" name="TextBox 9"/>
+          <p:cNvSpPr txBox="1"/>
+          <p:nvPr/>
+        </p:nvSpPr>
+        <p:spPr>
+          <a:xfrm>
+            <a:off x="640080" y="6537960"/>
+            <a:ext cx="10881360" cy="274320"/>
+          </a:xfrm>
+          <a:prstGeom prst="rect">
+            <a:avLst/>
+          </a:prstGeom>
+          <a:noFill/>
+        </p:spPr>
+        <p:txBody>
+          <a:bodyPr wrap="square" anchor="t" lIns="0" rIns="0" tIns="0" bIns="0">
+            <a:spAutoFit/>
+          </a:bodyPr>
+          <a:lstStyle/>
+          <a:p>
+            <a:pPr algn="l"/>
+            <a:r>
+              <a:rPr sz="1100" b="1">
+                <a:solidFill>
+                  <a:srgbClr val="2E7D4F"/>
+                </a:solidFill>
+              </a:rPr>
+              <a:t>Реальный вывод из прода: 10 онлайн + 6 NO SIGNAL  •  JPEG ~350 КБ  •  commit 2139055</a:t>
+            </a:r>
+          </a:p>
+        </p:txBody>
+      </p:sp>
+    </p:spTree>
+  </p:cSld>
+  <p:clrMapOvr>
+    <a:masterClrMapping/>
+  </p:clrMapOvr>
+</p:sld>
+</file>
+
+<file path=ppt/slides/slide14.xml><?xml version="1.0" encoding="utf-8"?>
 <p:sld xmlns:a="http://schemas.openxmlformats.org/drawingml/2006/main" xmlns:p="http://schemas.openxmlformats.org/presentationml/2006/main" xmlns:r="http://schemas.openxmlformats.org/officeDocument/2006/relationships">
   <p:cSld>
     <p:spTree>
@@ -6529,7 +7024,7 @@
 </p:sld>
 </file>
 
-<file path=ppt/slides/slide14.xml><?xml version="1.0" encoding="utf-8"?>
+<file path=ppt/slides/slide15.xml><?xml version="1.0" encoding="utf-8"?>
 <p:sld xmlns:a="http://schemas.openxmlformats.org/drawingml/2006/main" xmlns:p="http://schemas.openxmlformats.org/presentationml/2006/main" xmlns:r="http://schemas.openxmlformats.org/officeDocument/2006/relationships">
   <p:cSld>
     <p:spTree>
@@ -6956,7 +7451,7 @@
 </p:sld>
 </file>
 
-<file path=ppt/slides/slide15.xml><?xml version="1.0" encoding="utf-8"?>
+<file path=ppt/slides/slide16.xml><?xml version="1.0" encoding="utf-8"?>
 <p:sld xmlns:a="http://schemas.openxmlformats.org/drawingml/2006/main" xmlns:p="http://schemas.openxmlformats.org/presentationml/2006/main" xmlns:r="http://schemas.openxmlformats.org/officeDocument/2006/relationships">
   <p:cSld>
     <p:spTree>
@@ -7224,7 +7719,7 @@
 </p:sld>
 </file>
 
-<file path=ppt/slides/slide16.xml><?xml version="1.0" encoding="utf-8"?>
+<file path=ppt/slides/slide17.xml><?xml version="1.0" encoding="utf-8"?>
 <p:sld xmlns:a="http://schemas.openxmlformats.org/drawingml/2006/main" xmlns:p="http://schemas.openxmlformats.org/presentationml/2006/main" xmlns:r="http://schemas.openxmlformats.org/officeDocument/2006/relationships">
   <p:cSld>
     <p:spTree>
@@ -8087,497 +8582,6 @@
             <a:r>
               <a:rPr sz="1100"/>
               <a:t>cold-кадр: 1-й 6–8 с (подъём воркера), 2-й уже 0,2–3,2 с. Данные — долгий прогон 18.10: на комбинацию рестарт сервиса + frame×7 + потоки sub/main по 60 с + snapshot×3 + reaper + параллельная четвёрка.</a:t>
-            </a:r>
-          </a:p>
-        </p:txBody>
-      </p:sp>
-    </p:spTree>
-  </p:cSld>
-  <p:clrMapOvr>
-    <a:masterClrMapping/>
-  </p:clrMapOvr>
-</p:sld>
-</file>
-
-<file path=ppt/slides/slide17.xml><?xml version="1.0" encoding="utf-8"?>
-<p:sld xmlns:a="http://schemas.openxmlformats.org/drawingml/2006/main" xmlns:p="http://schemas.openxmlformats.org/presentationml/2006/main" xmlns:r="http://schemas.openxmlformats.org/officeDocument/2006/relationships">
-  <p:cSld>
-    <p:spTree>
-      <p:nvGrpSpPr>
-        <p:cNvPr id="1" name=""/>
-        <p:cNvGrpSpPr/>
-        <p:nvPr/>
-      </p:nvGrpSpPr>
-      <p:grpSpPr/>
-      <p:sp>
-        <p:nvSpPr>
-          <p:cNvPr id="2" name="Rectangle 1"/>
-          <p:cNvSpPr/>
-          <p:nvPr/>
-        </p:nvSpPr>
-        <p:spPr>
-          <a:xfrm>
-            <a:off x="0" y="0"/>
-            <a:ext cx="12188952" cy="1051560"/>
-          </a:xfrm>
-          <a:prstGeom prst="rect">
-            <a:avLst/>
-          </a:prstGeom>
-          <a:solidFill>
-            <a:srgbClr val="142033"/>
-          </a:solidFill>
-          <a:ln>
-            <a:noFill/>
-          </a:ln>
-          <a:effectLst/>
-        </p:spPr>
-        <p:style>
-          <a:lnRef idx="1">
-            <a:schemeClr val="accent1"/>
-          </a:lnRef>
-          <a:fillRef idx="3">
-            <a:schemeClr val="accent1"/>
-          </a:fillRef>
-          <a:effectRef idx="2">
-            <a:schemeClr val="accent1"/>
-          </a:effectRef>
-          <a:fontRef idx="minor">
-            <a:schemeClr val="lt1"/>
-          </a:fontRef>
-        </p:style>
-        <p:txBody>
-          <a:bodyPr rtlCol="0" anchor="ctr"/>
-          <a:lstStyle/>
-          <a:p>
-            <a:pPr algn="ctr"/>
-          </a:p>
-        </p:txBody>
-      </p:sp>
-      <p:sp>
-        <p:nvSpPr>
-          <p:cNvPr id="3" name="TextBox 2"/>
-          <p:cNvSpPr txBox="1"/>
-          <p:nvPr/>
-        </p:nvSpPr>
-        <p:spPr>
-          <a:xfrm>
-            <a:off x="640080" y="128016"/>
-            <a:ext cx="10515600" cy="274320"/>
-          </a:xfrm>
-          <a:prstGeom prst="rect">
-            <a:avLst/>
-          </a:prstGeom>
-          <a:noFill/>
-        </p:spPr>
-        <p:txBody>
-          <a:bodyPr wrap="square" anchor="t" lIns="0" rIns="0" tIns="0" bIns="0">
-            <a:spAutoFit/>
-          </a:bodyPr>
-          <a:lstStyle/>
-          <a:p>
-            <a:pPr algn="l"/>
-            <a:r>
-              <a:rPr sz="1100" b="1">
-                <a:solidFill>
-                  <a:srgbClr val="7FB2E8"/>
-                </a:solidFill>
-              </a:rPr>
-              <a:t>Проверка в проде</a:t>
-            </a:r>
-          </a:p>
-        </p:txBody>
-      </p:sp>
-      <p:sp>
-        <p:nvSpPr>
-          <p:cNvPr id="4" name="TextBox 3"/>
-          <p:cNvSpPr txBox="1"/>
-          <p:nvPr/>
-        </p:nvSpPr>
-        <p:spPr>
-          <a:xfrm>
-            <a:off x="640080" y="384048"/>
-            <a:ext cx="10881360" cy="640080"/>
-          </a:xfrm>
-          <a:prstGeom prst="rect">
-            <a:avLst/>
-          </a:prstGeom>
-          <a:noFill/>
-        </p:spPr>
-        <p:txBody>
-          <a:bodyPr wrap="square" anchor="t" lIns="0" rIns="0" tIns="0" bIns="0">
-            <a:spAutoFit/>
-          </a:bodyPr>
-          <a:lstStyle/>
-          <a:p>
-            <a:pPr algn="l"/>
-            <a:r>
-              <a:rPr sz="2700" b="1">
-                <a:solidFill>
-                  <a:srgbClr val="FFFFFF"/>
-                </a:solidFill>
-              </a:rPr>
-              <a:t>Сетка всех камер одним кадром: /preview</a:t>
-            </a:r>
-          </a:p>
-        </p:txBody>
-      </p:sp>
-      <p:sp>
-        <p:nvSpPr>
-          <p:cNvPr id="5" name="Rectangle 4"/>
-          <p:cNvSpPr/>
-          <p:nvPr/>
-        </p:nvSpPr>
-        <p:spPr>
-          <a:xfrm>
-            <a:off x="658368" y="1051560"/>
-            <a:ext cx="1463040" cy="45720"/>
-          </a:xfrm>
-          <a:prstGeom prst="rect">
-            <a:avLst/>
-          </a:prstGeom>
-          <a:solidFill>
-            <a:srgbClr val="2E86DE"/>
-          </a:solidFill>
-          <a:ln>
-            <a:noFill/>
-          </a:ln>
-          <a:effectLst/>
-        </p:spPr>
-        <p:style>
-          <a:lnRef idx="1">
-            <a:schemeClr val="accent1"/>
-          </a:lnRef>
-          <a:fillRef idx="3">
-            <a:schemeClr val="accent1"/>
-          </a:fillRef>
-          <a:effectRef idx="2">
-            <a:schemeClr val="accent1"/>
-          </a:effectRef>
-          <a:fontRef idx="minor">
-            <a:schemeClr val="lt1"/>
-          </a:fontRef>
-        </p:style>
-        <p:txBody>
-          <a:bodyPr rtlCol="0" anchor="ctr"/>
-          <a:lstStyle/>
-          <a:p>
-            <a:pPr algn="ctr"/>
-          </a:p>
-        </p:txBody>
-      </p:sp>
-      <p:sp>
-        <p:nvSpPr>
-          <p:cNvPr id="6" name="Rounded Rectangle 5"/>
-          <p:cNvSpPr/>
-          <p:nvPr/>
-        </p:nvSpPr>
-        <p:spPr>
-          <a:xfrm>
-            <a:off x="640080" y="1325880"/>
-            <a:ext cx="5577840" cy="5349240"/>
-          </a:xfrm>
-          <a:prstGeom prst="roundRect">
-            <a:avLst/>
-          </a:prstGeom>
-          <a:solidFill>
-            <a:srgbClr val="0D1522"/>
-          </a:solidFill>
-          <a:ln>
-            <a:noFill/>
-          </a:ln>
-          <a:effectLst/>
-        </p:spPr>
-        <p:style>
-          <a:lnRef idx="1">
-            <a:schemeClr val="accent1"/>
-          </a:lnRef>
-          <a:fillRef idx="3">
-            <a:schemeClr val="accent1"/>
-          </a:fillRef>
-          <a:effectRef idx="2">
-            <a:schemeClr val="accent1"/>
-          </a:effectRef>
-          <a:fontRef idx="minor">
-            <a:schemeClr val="lt1"/>
-          </a:fontRef>
-        </p:style>
-        <p:txBody>
-          <a:bodyPr rtlCol="0" anchor="ctr"/>
-          <a:lstStyle/>
-          <a:p>
-            <a:pPr algn="ctr"/>
-          </a:p>
-        </p:txBody>
-      </p:sp>
-      <p:pic>
-        <p:nvPicPr>
-          <p:cNvPr id="7" name="Picture 6" descr="preview_prod.jpg"/>
-          <p:cNvPicPr>
-            <a:picLocks noChangeAspect="1"/>
-          </p:cNvPicPr>
-          <p:nvPr/>
-        </p:nvPicPr>
-        <p:blipFill>
-          <a:blip r:embed="rId2"/>
-          <a:stretch>
-            <a:fillRect/>
-          </a:stretch>
-        </p:blipFill>
-        <p:spPr>
-          <a:xfrm>
-            <a:off x="777240" y="1463040"/>
-            <a:ext cx="5303520" cy="4599146"/>
-          </a:xfrm>
-          <a:prstGeom prst="rect">
-            <a:avLst/>
-          </a:prstGeom>
-        </p:spPr>
-      </p:pic>
-      <p:sp>
-        <p:nvSpPr>
-          <p:cNvPr id="8" name="TextBox 7"/>
-          <p:cNvSpPr txBox="1"/>
-          <p:nvPr/>
-        </p:nvSpPr>
-        <p:spPr>
-          <a:xfrm>
-            <a:off x="6446520" y="1463040"/>
-            <a:ext cx="5212080" cy="320040"/>
-          </a:xfrm>
-          <a:prstGeom prst="rect">
-            <a:avLst/>
-          </a:prstGeom>
-          <a:noFill/>
-        </p:spPr>
-        <p:txBody>
-          <a:bodyPr wrap="square" anchor="t" lIns="0" rIns="0" tIns="0" bIns="0">
-            <a:spAutoFit/>
-          </a:bodyPr>
-          <a:lstStyle/>
-          <a:p>
-            <a:pPr algn="l"/>
-            <a:r>
-              <a:rPr sz="1250" b="1">
-                <a:solidFill>
-                  <a:srgbClr val="FFFFFF"/>
-                </a:solidFill>
-              </a:rPr>
-              <a:t>GET /preview?cell=320&amp;workers=8&amp;quality=88</a:t>
-            </a:r>
-          </a:p>
-        </p:txBody>
-      </p:sp>
-      <p:sp>
-        <p:nvSpPr>
-          <p:cNvPr id="9" name="TextBox 8"/>
-          <p:cNvSpPr txBox="1"/>
-          <p:nvPr/>
-        </p:nvSpPr>
-        <p:spPr>
-          <a:xfrm>
-            <a:off x="6446520" y="1965960"/>
-            <a:ext cx="5212080" cy="4480560"/>
-          </a:xfrm>
-          <a:prstGeom prst="rect">
-            <a:avLst/>
-          </a:prstGeom>
-          <a:noFill/>
-        </p:spPr>
-        <p:txBody>
-          <a:bodyPr wrap="square" anchor="t" lIns="0" rIns="0" tIns="0" bIns="0">
-            <a:spAutoFit/>
-          </a:bodyPr>
-          <a:lstStyle/>
-          <a:p>
-            <a:pPr algn="l">
-              <a:spcAft>
-                <a:spcPts val="1000"/>
-              </a:spcAft>
-            </a:pPr>
-            <a:r>
-              <a:rPr sz="1150" b="1">
-                <a:solidFill>
-                  <a:srgbClr val="1B5EB0"/>
-                </a:solidFill>
-              </a:rPr>
-              <a:t>Авто-раскладка</a:t>
-            </a:r>
-            <a:r>
-              <a:rPr sz="1150" b="0">
-                <a:solidFill>
-                  <a:srgbClr val="4A5568"/>
-                </a:solidFill>
-              </a:rPr>
-              <a:t> под число камер: 16 → 4×4, 12 → 4×3, 10 → 5×2, 8 → 4×2 — равномерная, без «хвоста» из одиночных ячеек</a:t>
-            </a:r>
-          </a:p>
-          <a:p>
-            <a:pPr algn="l">
-              <a:spcAft>
-                <a:spcPts val="1000"/>
-              </a:spcAft>
-            </a:pPr>
-            <a:r>
-              <a:rPr sz="1150" b="1">
-                <a:solidFill>
-                  <a:srgbClr val="1B5EB0"/>
-                </a:solidFill>
-              </a:rPr>
-              <a:t>NO SIGNAL</a:t>
-            </a:r>
-            <a:r>
-              <a:rPr sz="1150" b="0">
-                <a:solidFill>
-                  <a:srgbClr val="4A5568"/>
-                </a:solidFill>
-              </a:rPr>
-              <a:t> вместо недоступных: оффлайн-камеры не выкидываются — видно, какие каналы молчат, на фоне живых кадров</a:t>
-            </a:r>
-          </a:p>
-          <a:p>
-            <a:pPr algn="l">
-              <a:spcAft>
-                <a:spcPts val="1000"/>
-              </a:spcAft>
-            </a:pPr>
-            <a:r>
-              <a:rPr sz="1150" b="1">
-                <a:solidFill>
-                  <a:srgbClr val="1B5EB0"/>
-                </a:solidFill>
-              </a:rPr>
-              <a:t>Шапка и подписи</a:t>
-            </a:r>
-            <a:r>
-              <a:rPr sz="1150" b="0">
-                <a:solidFill>
-                  <a:srgbClr val="4A5568"/>
-                </a:solidFill>
-              </a:rPr>
-              <a:t> — название NVR, время снимка, «онлайн N/M»; под ячейкой CH N + имя камеры (длинные — с многоточием)</a:t>
-            </a:r>
-          </a:p>
-          <a:p>
-            <a:pPr algn="l">
-              <a:spcAft>
-                <a:spcPts val="600"/>
-              </a:spcAft>
-            </a:pPr>
-            <a:r>
-              <a:rPr sz="1150" b="1">
-                <a:solidFill>
-                  <a:srgbClr val="1B5EB0"/>
-                </a:solidFill>
-              </a:rPr>
-              <a:t>Время ответа</a:t>
-            </a:r>
-            <a:r>
-              <a:rPr sz="1150" b="0">
-                <a:solidFill>
-                  <a:srgbClr val="4A5568"/>
-                </a:solidFill>
-              </a:rPr>
-              <a:t> складывается из времени получения снапшотов (рендер сетки &lt;0,1 с): снапшоты снимаются параллельно, время = самый медленный</a:t>
-            </a:r>
-          </a:p>
-          <a:p>
-            <a:pPr algn="l">
-              <a:spcAft>
-                <a:spcPts val="1000"/>
-              </a:spcAft>
-            </a:pPr>
-            <a:r>
-              <a:rPr sz="1150" b="1">
-                <a:solidFill>
-                  <a:srgbClr val="1B5EB0"/>
-                </a:solidFill>
-              </a:rPr>
-              <a:t>онлайн-камера ~1,5 с</a:t>
-            </a:r>
-            <a:r>
-              <a:rPr sz="1150" b="0">
-                <a:solidFill>
-                  <a:srgbClr val="4A5568"/>
-                </a:solidFill>
-              </a:rPr>
-              <a:t>; </a:t>
-            </a:r>
-            <a:r>
-              <a:rPr sz="1150" b="1">
-                <a:solidFill>
-                  <a:srgbClr val="1B5EB0"/>
-                </a:solidFill>
-              </a:rPr>
-              <a:t>оффлайн ~20 с</a:t>
-            </a:r>
-            <a:r>
-              <a:rPr sz="1150" b="0">
-                <a:solidFill>
-                  <a:srgbClr val="4A5568"/>
-                </a:solidFill>
-              </a:rPr>
-              <a:t> (облако отвечает 502 только после долгого ожидания) → 16 камер: </a:t>
-            </a:r>
-            <a:r>
-              <a:rPr sz="1150" b="1">
-                <a:solidFill>
-                  <a:srgbClr val="1B5EB0"/>
-                </a:solidFill>
-              </a:rPr>
-              <a:t>~24 с</a:t>
-            </a:r>
-          </a:p>
-          <a:p>
-            <a:pPr algn="l"/>
-            <a:r>
-              <a:rPr sz="1150" b="1">
-                <a:solidFill>
-                  <a:srgbClr val="1B5EB0"/>
-                </a:solidFill>
-              </a:rPr>
-              <a:t>Доступно из браузера</a:t>
-            </a:r>
-            <a:r>
-              <a:rPr sz="1150" b="0">
-                <a:solidFill>
-                  <a:srgbClr val="4A5568"/>
-                </a:solidFill>
-              </a:rPr>
-              <a:t>: &lt;img src="http://&lt;host&gt;:8000/preview"&gt; — дашборд стенда одной ссылкой</a:t>
-            </a:r>
-          </a:p>
-        </p:txBody>
-      </p:sp>
-      <p:sp>
-        <p:nvSpPr>
-          <p:cNvPr id="10" name="TextBox 9"/>
-          <p:cNvSpPr txBox="1"/>
-          <p:nvPr/>
-        </p:nvSpPr>
-        <p:spPr>
-          <a:xfrm>
-            <a:off x="640080" y="6355080"/>
-            <a:ext cx="10881360" cy="365760"/>
-          </a:xfrm>
-          <a:prstGeom prst="rect">
-            <a:avLst/>
-          </a:prstGeom>
-          <a:noFill/>
-        </p:spPr>
-        <p:txBody>
-          <a:bodyPr wrap="square" anchor="t" lIns="0" rIns="0" tIns="0" bIns="0">
-            <a:spAutoFit/>
-          </a:bodyPr>
-          <a:lstStyle/>
-          <a:p>
-            <a:pPr algn="l"/>
-            <a:r>
-              <a:rPr sz="1200" b="1">
-                <a:solidFill>
-                  <a:srgbClr val="2E7D4F"/>
-                </a:solidFill>
-              </a:rPr>
-              <a:t>Реальный вывод из прода: 10 онлайн + 6 NO SIGNAL  •  JPEG ~350 КБ  •  commit 2139055</a:t>
             </a:r>
           </a:p>
         </p:txBody>

--- a/hikcloud2rtc.pptx
+++ b/hikcloud2rtc.pptx
@@ -6165,7 +6165,7 @@
                   <a:srgbClr val="2E7D4F"/>
                 </a:solidFill>
               </a:rPr>
-              <a:t>Реальный вывод из прода: 10 онлайн + 6 NO SIGNAL  •  JPEG ~350 КБ  •  commit 2139055</a:t>
+              <a:t>Реальный вывод из прода: 10 онлайн + 6 NO SIGNAL  •  JPEG ~350 КБ  •  commit 8a8fc28</a:t>
             </a:r>
           </a:p>
         </p:txBody>

--- a/hikcloud2rtc.pptx
+++ b/hikcloud2rtc.pptx
@@ -7705,7 +7705,7 @@
 2. Опционально: go2rtc отдельным контейнером (RTSP/HLS)
 3. Мониторинг: алерт по /health, логирование 502/2009
 17–18.10: WORKER_MODE always/idle + /prime (прогрев по звонку) + idle-reaper — 0 утечек активных клиентов
-Логи: app.log + worker_*.log с ротацией в volume, эндпоинт /logs, docker json-file 10m×1 (единый стандарт по хостам Dockhand)
+Логи: app.log + worker_*.log с ротацией в volume, эндпоинт /logs, docker json-file 10m×1 (единый стандарт по хостам)
 snapshot: re-login + 1 retry при 401 (токен истекал), обрезка хвоста JPEG после EOI</a:t>
             </a:r>
           </a:p>
